--- a/docs/architecture/Tellumen-Functional-Architecture.pptx
+++ b/docs/architecture/Tellumen-Functional-Architecture.pptx
@@ -1290,7 +1290,7 @@
                 <a:ea typeface="Arial" pitchFamily="34" charset="-122"/>
                 <a:cs typeface="Arial" pitchFamily="34" charset="-120"/>
               </a:rPr>
-              <a:t>0.25° · since 1940</a:t>
+              <a:t>ERA5 · since 1940</a:t>
             </a:r>
             <a:pPr algn="l" indent="0" marL="0">
               <a:lnSpc>
@@ -1373,7 +1373,7 @@
                 <a:ea typeface="Arial" pitchFamily="34" charset="-122"/>
                 <a:cs typeface="Arial" pitchFamily="34" charset="-120"/>
               </a:rPr>
-              <a:t>Flood &amp; hydrology</a:t>
+              <a:t>Flood (runoff proxy)</a:t>
             </a:r>
             <a:endParaRPr lang="en-US" sz="880" dirty="0"/>
           </a:p>
@@ -1452,7 +1452,7 @@
         <p:spPr>
           <a:xfrm>
             <a:off x="502920" y="2418588"/>
-            <a:ext cx="1916582" cy="64008"/>
+            <a:ext cx="1677010" cy="64008"/>
           </a:xfrm>
           <a:prstGeom prst="roundRect">
             <a:avLst>
@@ -1501,7 +1501,7 @@
                 <a:ea typeface="Arial" pitchFamily="34" charset="-122"/>
                 <a:cs typeface="Arial" pitchFamily="34" charset="-120"/>
               </a:rPr>
-              <a:t>~5 km global</a:t>
+              <a:t>~9 km global</a:t>
             </a:r>
             <a:pPr algn="l" indent="0" marL="0">
               <a:lnSpc>
@@ -1518,7 +1518,7 @@
                 <a:ea typeface="Arial" pitchFamily="34" charset="-122"/>
                 <a:cs typeface="Arial" pitchFamily="34" charset="-120"/>
               </a:rPr>
-              <a:t>  ·  GloFAS · terrain</a:t>
+              <a:t>  ·  ERA5-Land runoff</a:t>
             </a:r>
             <a:endParaRPr lang="en-US" sz="640" dirty="0"/>
           </a:p>
@@ -1584,7 +1584,7 @@
                 <a:ea typeface="Arial" pitchFamily="34" charset="-122"/>
                 <a:cs typeface="Arial" pitchFamily="34" charset="-120"/>
               </a:rPr>
-              <a:t>Fire, thermal &amp; air</a:t>
+              <a:t>Fire &amp; thermal</a:t>
             </a:r>
             <a:endParaRPr lang="en-US" sz="880" dirty="0"/>
           </a:p>
@@ -1663,7 +1663,7 @@
         <p:spPr>
           <a:xfrm>
             <a:off x="502920" y="2921508"/>
-            <a:ext cx="1677010" cy="64008"/>
+            <a:ext cx="1629095" cy="64008"/>
           </a:xfrm>
           <a:prstGeom prst="roundRect">
             <a:avLst>
@@ -1729,7 +1729,7 @@
                 <a:ea typeface="Arial" pitchFamily="34" charset="-122"/>
                 <a:cs typeface="Arial" pitchFamily="34" charset="-120"/>
               </a:rPr>
-              <a:t>  ·  FIRMS · Sentinel-3 · CAMS</a:t>
+              <a:t>  ·  NASA FIRMS · CAMS</a:t>
             </a:r>
             <a:endParaRPr lang="en-US" sz="640" dirty="0"/>
           </a:p>
@@ -1795,7 +1795,7 @@
                 <a:ea typeface="Arial" pitchFamily="34" charset="-122"/>
                 <a:cs typeface="Arial" pitchFamily="34" charset="-120"/>
               </a:rPr>
-              <a:t>Radar &amp; optical imagery</a:t>
+              <a:t>Storms &amp; cyclones</a:t>
             </a:r>
             <a:endParaRPr lang="en-US" sz="880" dirty="0"/>
           </a:p>
@@ -1837,7 +1837,7 @@
                 <a:ea typeface="Arial" pitchFamily="34" charset="-122"/>
                 <a:cs typeface="Arial" pitchFamily="34" charset="-120"/>
               </a:rPr>
-              <a:t>≈ 5 d</a:t>
+              <a:t>per event</a:t>
             </a:r>
             <a:endParaRPr lang="en-US" sz="680" dirty="0"/>
           </a:p>
@@ -1874,7 +1874,7 @@
         <p:spPr>
           <a:xfrm>
             <a:off x="502920" y="3424428"/>
-            <a:ext cx="2204070" cy="64008"/>
+            <a:ext cx="1245779" cy="64008"/>
           </a:xfrm>
           <a:prstGeom prst="roundRect">
             <a:avLst>
@@ -1923,7 +1923,7 @@
                 <a:ea typeface="Arial" pitchFamily="34" charset="-122"/>
                 <a:cs typeface="Arial" pitchFamily="34" charset="-120"/>
               </a:rPr>
-              <a:t>10 m · revisit days</a:t>
+              <a:t>cyclone tracks</a:t>
             </a:r>
             <a:pPr algn="l" indent="0" marL="0">
               <a:lnSpc>
@@ -1940,7 +1940,7 @@
                 <a:ea typeface="Arial" pitchFamily="34" charset="-122"/>
                 <a:cs typeface="Arial" pitchFamily="34" charset="-120"/>
               </a:rPr>
-              <a:t>  ·  Sentinel-1 / 2</a:t>
+              <a:t>  ·  NOAA IBTrACS</a:t>
             </a:r>
             <a:endParaRPr lang="en-US" sz="640" dirty="0"/>
           </a:p>
@@ -2006,7 +2006,7 @@
                 <a:ea typeface="Arial" pitchFamily="34" charset="-122"/>
                 <a:cs typeface="Arial" pitchFamily="34" charset="-120"/>
               </a:rPr>
-              <a:t>Storms &amp; ocean</a:t>
+              <a:t>Seismic &amp; volcanic</a:t>
             </a:r>
             <a:endParaRPr lang="en-US" sz="880" dirty="0"/>
           </a:p>
@@ -2048,7 +2048,7 @@
                 <a:ea typeface="Arial" pitchFamily="34" charset="-122"/>
                 <a:cs typeface="Arial" pitchFamily="34" charset="-120"/>
               </a:rPr>
-              <a:t>per event</a:t>
+              <a:t>continuous</a:t>
             </a:r>
             <a:endParaRPr lang="en-US" sz="680" dirty="0"/>
           </a:p>
@@ -2085,7 +2085,7 @@
         <p:spPr>
           <a:xfrm>
             <a:off x="502920" y="3927348"/>
-            <a:ext cx="1245779" cy="64008"/>
+            <a:ext cx="1102035" cy="64008"/>
           </a:xfrm>
           <a:prstGeom prst="roundRect">
             <a:avLst>
@@ -2134,7 +2134,7 @@
                 <a:ea typeface="Arial" pitchFamily="34" charset="-122"/>
                 <a:cs typeface="Arial" pitchFamily="34" charset="-120"/>
               </a:rPr>
-              <a:t>cyclone tracks · sea state</a:t>
+              <a:t>EU seismic + zones</a:t>
             </a:r>
             <a:pPr algn="l" indent="0" marL="0">
               <a:lnSpc>
@@ -2151,7 +2151,7 @@
                 <a:ea typeface="Arial" pitchFamily="34" charset="-122"/>
                 <a:cs typeface="Arial" pitchFamily="34" charset="-120"/>
               </a:rPr>
-              <a:t>  ·  IBTrACS · Marine</a:t>
+              <a:t>  ·  EMSC · GVP · ESHM20</a:t>
             </a:r>
             <a:endParaRPr lang="en-US" sz="640" dirty="0"/>
           </a:p>
@@ -2217,7 +2217,7 @@
                 <a:ea typeface="Arial" pitchFamily="34" charset="-122"/>
                 <a:cs typeface="Arial" pitchFamily="34" charset="-120"/>
               </a:rPr>
-              <a:t>Seismic &amp; volcanic</a:t>
+              <a:t>Deforestation</a:t>
             </a:r>
             <a:endParaRPr lang="en-US" sz="880" dirty="0"/>
           </a:p>
@@ -2253,13 +2253,13 @@
             <a:r>
               <a:rPr lang="en-US" sz="680" b="1" dirty="0">
                 <a:solidFill>
-                  <a:srgbClr val="9AD0B4"/>
-                </a:solidFill>
-                <a:latin typeface="Arial" pitchFamily="34" charset="0"/>
-                <a:ea typeface="Arial" pitchFamily="34" charset="-122"/>
-                <a:cs typeface="Arial" pitchFamily="34" charset="-120"/>
-              </a:rPr>
-              <a:t>continuous</a:t>
+                  <a:srgbClr val="63756A"/>
+                </a:solidFill>
+                <a:latin typeface="Arial" pitchFamily="34" charset="0"/>
+                <a:ea typeface="Arial" pitchFamily="34" charset="-122"/>
+                <a:cs typeface="Arial" pitchFamily="34" charset="-120"/>
+              </a:rPr>
+              <a:t>annual</a:t>
             </a:r>
             <a:endParaRPr lang="en-US" sz="680" dirty="0"/>
           </a:p>
@@ -2296,7 +2296,7 @@
         <p:spPr>
           <a:xfrm>
             <a:off x="502920" y="4430268"/>
-            <a:ext cx="1102035" cy="64008"/>
+            <a:ext cx="1389522" cy="64008"/>
           </a:xfrm>
           <a:prstGeom prst="roundRect">
             <a:avLst>
@@ -2345,7 +2345,7 @@
                 <a:ea typeface="Arial" pitchFamily="34" charset="-122"/>
                 <a:cs typeface="Arial" pitchFamily="34" charset="-120"/>
               </a:rPr>
-              <a:t>global catalogs + zones</a:t>
+              <a:t>30 m forest, 2020+</a:t>
             </a:r>
             <a:pPr algn="l" indent="0" marL="0">
               <a:lnSpc>
@@ -2362,7 +2362,7 @@
                 <a:ea typeface="Arial" pitchFamily="34" charset="-122"/>
                 <a:cs typeface="Arial" pitchFamily="34" charset="-120"/>
               </a:rPr>
-              <a:t>  ·  USGS · GEM · GVP</a:t>
+              <a:t>  ·  Hansen GFC</a:t>
             </a:r>
             <a:endParaRPr lang="en-US" sz="640" dirty="0"/>
           </a:p>
@@ -2428,7 +2428,7 @@
                 <a:ea typeface="Arial" pitchFamily="34" charset="-122"/>
                 <a:cs typeface="Arial" pitchFamily="34" charset="-120"/>
               </a:rPr>
-              <a:t>Deforestation &amp; reference</a:t>
+              <a:t>Reference &amp; entity</a:t>
             </a:r>
             <a:endParaRPr lang="en-US" sz="880" dirty="0"/>
           </a:p>
@@ -2470,7 +2470,7 @@
                 <a:ea typeface="Arial" pitchFamily="34" charset="-122"/>
                 <a:cs typeface="Arial" pitchFamily="34" charset="-120"/>
               </a:rPr>
-              <a:t>yearly → daily</a:t>
+              <a:t>daily</a:t>
             </a:r>
             <a:endParaRPr lang="en-US" sz="680" dirty="0"/>
           </a:p>
@@ -2507,7 +2507,7 @@
         <p:spPr>
           <a:xfrm>
             <a:off x="502920" y="4933188"/>
-            <a:ext cx="1581180" cy="64008"/>
+            <a:ext cx="1197864" cy="64008"/>
           </a:xfrm>
           <a:prstGeom prst="roundRect">
             <a:avLst>
@@ -2556,7 +2556,7 @@
                 <a:ea typeface="Arial" pitchFamily="34" charset="-122"/>
                 <a:cs typeface="Arial" pitchFamily="34" charset="-120"/>
               </a:rPr>
-              <a:t>30 m forest · 2.7M LEIs</a:t>
+              <a:t>2.7M LEIs · sector est.</a:t>
             </a:r>
             <a:pPr algn="l" indent="0" marL="0">
               <a:lnSpc>
@@ -2573,7 +2573,7 @@
                 <a:ea typeface="Arial" pitchFamily="34" charset="-122"/>
                 <a:cs typeface="Arial" pitchFamily="34" charset="-120"/>
               </a:rPr>
-              <a:t>  ·  Hansen · GLEIF</a:t>
+              <a:t>  ·  GLEIF · NACE</a:t>
             </a:r>
             <a:endParaRPr lang="en-US" sz="640" dirty="0"/>
           </a:p>
